--- a/제출_준비/제출파일/발표자료_철철철.pptx
+++ b/제출_준비/제출파일/발표자료_철철철.pptx
@@ -2817,45 +2817,6 @@
           </a:graphicData>
         </a:graphic>
       </p:graphicFrame>
-      <p:sp>
-        <p:nvSpPr>
-          <p:cNvPr id="9" name="Text 5"/>
-          <p:cNvSpPr txBox="1"/>
-          <p:nvPr/>
-        </p:nvSpPr>
-        <p:spPr>
-          <a:xfrm>
-            <a:off x="548640" y="6355080"/>
-            <a:ext cx="11064240" cy="320040"/>
-          </a:xfrm>
-          <a:prstGeom prst="rect">
-            <a:avLst/>
-          </a:prstGeom>
-          <a:noFill/>
-          <a:ln/>
-        </p:spPr>
-        <p:txBody>
-          <a:bodyPr wrap="square" lIns="0" tIns="0" rIns="0" bIns="0" rtlCol="0" anchor="t"/>
-          <a:lstStyle/>
-          <a:p>
-            <a:pPr indent="0" marL="0">
-              <a:buNone/>
-            </a:pPr>
-            <a:r>
-              <a:rPr lang="en-US" sz="1300" dirty="0">
-                <a:solidFill>
-                  <a:srgbClr val="595959"/>
-                </a:solidFill>
-                <a:latin typeface="Malgun Gothic" pitchFamily="34" charset="0"/>
-                <a:ea typeface="Malgun Gothic" pitchFamily="34" charset="-122"/>
-                <a:cs typeface="Malgun Gothic" pitchFamily="34" charset="-120"/>
-              </a:rPr>
-              <a:t>근거: 완료보고서 5.3 · 비즈니스모델.md</a:t>
-            </a:r>
-            <a:endParaRPr lang="en-US" sz="1300" dirty="0"/>
-          </a:p>
-        </p:txBody>
-      </p:sp>
     </p:spTree>
   </p:cSld>
   <p:clrMapOvr>
@@ -3107,6 +3068,10 @@
             <a:prstDash val="solid"/>
           </a:ln>
         </p:spPr>
+        <p:txBody>
+          <a:bodyPr/>
+          <a:p/>
+        </p:txBody>
       </p:sp>
       <p:sp>
         <p:nvSpPr>
@@ -3210,6 +3175,10 @@
             <a:prstDash val="solid"/>
           </a:ln>
         </p:spPr>
+        <p:txBody>
+          <a:bodyPr/>
+          <a:p/>
+        </p:txBody>
       </p:sp>
       <p:sp>
         <p:nvSpPr>
@@ -3313,6 +3282,10 @@
             <a:prstDash val="solid"/>
           </a:ln>
         </p:spPr>
+        <p:txBody>
+          <a:bodyPr/>
+          <a:p/>
+        </p:txBody>
       </p:sp>
       <p:sp>
         <p:nvSpPr>
@@ -3416,6 +3389,10 @@
             <a:prstDash val="solid"/>
           </a:ln>
         </p:spPr>
+        <p:txBody>
+          <a:bodyPr/>
+          <a:p/>
+        </p:txBody>
       </p:sp>
       <p:sp>
         <p:nvSpPr>
@@ -3558,6 +3535,10 @@
             <a:prstDash val="solid"/>
           </a:ln>
         </p:spPr>
+        <p:txBody>
+          <a:bodyPr/>
+          <a:p/>
+        </p:txBody>
       </p:sp>
       <p:sp>
         <p:nvSpPr>
@@ -4287,6 +4268,10 @@
             <a:prstDash val="solid"/>
           </a:ln>
         </p:spPr>
+        <p:txBody>
+          <a:bodyPr/>
+          <a:p/>
+        </p:txBody>
       </p:sp>
       <p:sp>
         <p:nvSpPr>
@@ -4365,6 +4350,10 @@
             <a:prstDash val="solid"/>
           </a:ln>
         </p:spPr>
+        <p:txBody>
+          <a:bodyPr/>
+          <a:p/>
+        </p:txBody>
       </p:sp>
       <p:sp>
         <p:nvSpPr>
@@ -4468,6 +4457,10 @@
             <a:prstDash val="solid"/>
           </a:ln>
         </p:spPr>
+        <p:txBody>
+          <a:bodyPr/>
+          <a:p/>
+        </p:txBody>
       </p:sp>
       <p:sp>
         <p:nvSpPr>
@@ -4571,6 +4564,10 @@
             <a:prstDash val="solid"/>
           </a:ln>
         </p:spPr>
+        <p:txBody>
+          <a:bodyPr/>
+          <a:p/>
+        </p:txBody>
       </p:sp>
       <p:sp>
         <p:nvSpPr>
@@ -4674,6 +4671,10 @@
             <a:prstDash val="solid"/>
           </a:ln>
         </p:spPr>
+        <p:txBody>
+          <a:bodyPr/>
+          <a:p/>
+        </p:txBody>
       </p:sp>
       <p:sp>
         <p:nvSpPr>
@@ -4926,6 +4927,10 @@
             <a:prstDash val="solid"/>
           </a:ln>
         </p:spPr>
+        <p:txBody>
+          <a:bodyPr/>
+          <a:p/>
+        </p:txBody>
       </p:sp>
       <p:sp>
         <p:nvSpPr>
@@ -4951,6 +4956,10 @@
             <a:prstDash val="solid"/>
           </a:ln>
         </p:spPr>
+        <p:txBody>
+          <a:bodyPr/>
+          <a:p/>
+        </p:txBody>
       </p:sp>
       <p:sp>
         <p:nvSpPr>
@@ -5149,6 +5158,10 @@
             <a:prstDash val="solid"/>
           </a:ln>
         </p:spPr>
+        <p:txBody>
+          <a:bodyPr/>
+          <a:p/>
+        </p:txBody>
       </p:sp>
       <p:sp>
         <p:nvSpPr>
@@ -5174,6 +5187,10 @@
             <a:prstDash val="solid"/>
           </a:ln>
         </p:spPr>
+        <p:txBody>
+          <a:bodyPr/>
+          <a:p/>
+        </p:txBody>
       </p:sp>
       <p:sp>
         <p:nvSpPr>
@@ -5372,6 +5389,10 @@
             <a:prstDash val="solid"/>
           </a:ln>
         </p:spPr>
+        <p:txBody>
+          <a:bodyPr/>
+          <a:p/>
+        </p:txBody>
       </p:sp>
       <p:sp>
         <p:nvSpPr>
@@ -5397,6 +5418,10 @@
             <a:prstDash val="solid"/>
           </a:ln>
         </p:spPr>
+        <p:txBody>
+          <a:bodyPr/>
+          <a:p/>
+        </p:txBody>
       </p:sp>
       <p:sp>
         <p:nvSpPr>
@@ -5595,6 +5620,10 @@
             <a:prstDash val="solid"/>
           </a:ln>
         </p:spPr>
+        <p:txBody>
+          <a:bodyPr/>
+          <a:p/>
+        </p:txBody>
       </p:sp>
       <p:sp>
         <p:nvSpPr>
@@ -5620,6 +5649,10 @@
             <a:prstDash val="solid"/>
           </a:ln>
         </p:spPr>
+        <p:txBody>
+          <a:bodyPr/>
+          <a:p/>
+        </p:txBody>
       </p:sp>
       <p:sp>
         <p:nvSpPr>
@@ -5818,6 +5851,10 @@
             <a:prstDash val="solid"/>
           </a:ln>
         </p:spPr>
+        <p:txBody>
+          <a:bodyPr/>
+          <a:p/>
+        </p:txBody>
       </p:sp>
       <p:sp>
         <p:nvSpPr>
@@ -5843,6 +5880,10 @@
             <a:prstDash val="solid"/>
           </a:ln>
         </p:spPr>
+        <p:txBody>
+          <a:bodyPr/>
+          <a:p/>
+        </p:txBody>
       </p:sp>
       <p:sp>
         <p:nvSpPr>
@@ -6190,6 +6231,10 @@
             <a:prstDash val="solid"/>
           </a:ln>
         </p:spPr>
+        <p:txBody>
+          <a:bodyPr/>
+          <a:p/>
+        </p:txBody>
       </p:sp>
       <p:sp>
         <p:nvSpPr>
@@ -6332,6 +6377,10 @@
             <a:prstDash val="solid"/>
           </a:ln>
         </p:spPr>
+        <p:txBody>
+          <a:bodyPr/>
+          <a:p/>
+        </p:txBody>
       </p:sp>
       <p:sp>
         <p:nvSpPr>
@@ -6474,6 +6523,10 @@
             <a:prstDash val="solid"/>
           </a:ln>
         </p:spPr>
+        <p:txBody>
+          <a:bodyPr/>
+          <a:p/>
+        </p:txBody>
       </p:sp>
       <p:sp>
         <p:nvSpPr>
@@ -6577,6 +6630,10 @@
             <a:prstDash val="solid"/>
           </a:ln>
         </p:spPr>
+        <p:txBody>
+          <a:bodyPr/>
+          <a:p/>
+        </p:txBody>
       </p:sp>
       <p:sp>
         <p:nvSpPr>
@@ -6719,6 +6776,10 @@
             <a:prstDash val="solid"/>
           </a:ln>
         </p:spPr>
+        <p:txBody>
+          <a:bodyPr/>
+          <a:p/>
+        </p:txBody>
       </p:sp>
       <p:sp>
         <p:nvSpPr>
@@ -6861,6 +6922,10 @@
             <a:prstDash val="solid"/>
           </a:ln>
         </p:spPr>
+        <p:txBody>
+          <a:bodyPr/>
+          <a:p/>
+        </p:txBody>
       </p:sp>
       <p:sp>
         <p:nvSpPr>
@@ -7003,6 +7068,10 @@
             <a:prstDash val="solid"/>
           </a:ln>
         </p:spPr>
+        <p:txBody>
+          <a:bodyPr/>
+          <a:p/>
+        </p:txBody>
       </p:sp>
       <p:sp>
         <p:nvSpPr>
@@ -8206,6 +8275,10 @@
             <a:prstDash val="solid"/>
           </a:ln>
         </p:spPr>
+        <p:txBody>
+          <a:bodyPr/>
+          <a:p/>
+        </p:txBody>
       </p:sp>
       <p:sp>
         <p:nvSpPr>
@@ -8279,7 +8352,7 @@
                 <a:ea typeface="Malgun Gothic" pitchFamily="34" charset="-122"/>
                 <a:cs typeface="Malgun Gothic" pitchFamily="34" charset="-120"/>
               </a:rPr>
-              <a:t>근거: 행정안전부 인파관리 매뉴얼 · 가이드라인 대조 (심각도_기준_양식.md)</a:t>
+              <a:t>근거: 행정안전부 지역축제장 안전관리 매뉴얼 · 다중운집인파사고 안전관리 가이드라인</a:t>
             </a:r>
             <a:endParaRPr lang="en-US" sz="1300" dirty="0"/>
           </a:p>
@@ -8458,6 +8531,10 @@
             <a:prstDash val="solid"/>
           </a:ln>
         </p:spPr>
+        <p:txBody>
+          <a:bodyPr/>
+          <a:p/>
+        </p:txBody>
       </p:sp>
       <p:sp>
         <p:nvSpPr>
@@ -8561,6 +8638,10 @@
             <a:prstDash val="solid"/>
           </a:ln>
         </p:spPr>
+        <p:txBody>
+          <a:bodyPr/>
+          <a:p/>
+        </p:txBody>
       </p:sp>
       <p:sp>
         <p:nvSpPr>
@@ -8664,6 +8745,10 @@
             <a:prstDash val="solid"/>
           </a:ln>
         </p:spPr>
+        <p:txBody>
+          <a:bodyPr/>
+          <a:p/>
+        </p:txBody>
       </p:sp>
       <p:sp>
         <p:nvSpPr>
@@ -8767,6 +8852,10 @@
             <a:prstDash val="solid"/>
           </a:ln>
         </p:spPr>
+        <p:txBody>
+          <a:bodyPr/>
+          <a:p/>
+        </p:txBody>
       </p:sp>
       <p:sp>
         <p:nvSpPr>
@@ -8870,6 +8959,10 @@
             <a:prstDash val="solid"/>
           </a:ln>
         </p:spPr>
+        <p:txBody>
+          <a:bodyPr/>
+          <a:p/>
+        </p:txBody>
       </p:sp>
       <p:sp>
         <p:nvSpPr>
@@ -8973,6 +9066,10 @@
             <a:prstDash val="solid"/>
           </a:ln>
         </p:spPr>
+        <p:txBody>
+          <a:bodyPr/>
+          <a:p/>
+        </p:txBody>
       </p:sp>
       <p:sp>
         <p:nvSpPr>
@@ -9037,6 +9134,10 @@
             <a:prstDash val="solid"/>
           </a:ln>
         </p:spPr>
+        <p:txBody>
+          <a:bodyPr/>
+          <a:p/>
+        </p:txBody>
       </p:sp>
       <p:sp>
         <p:nvSpPr>
@@ -10321,6 +10422,10 @@
             <a:prstDash val="solid"/>
           </a:ln>
         </p:spPr>
+        <p:txBody>
+          <a:bodyPr/>
+          <a:p/>
+        </p:txBody>
       </p:sp>
       <p:sp>
         <p:nvSpPr>
@@ -10424,6 +10529,10 @@
             <a:prstDash val="solid"/>
           </a:ln>
         </p:spPr>
+        <p:txBody>
+          <a:bodyPr/>
+          <a:p/>
+        </p:txBody>
       </p:sp>
       <p:sp>
         <p:nvSpPr>
@@ -10527,6 +10636,10 @@
             <a:prstDash val="solid"/>
           </a:ln>
         </p:spPr>
+        <p:txBody>
+          <a:bodyPr/>
+          <a:p/>
+        </p:txBody>
       </p:sp>
       <p:sp>
         <p:nvSpPr>
@@ -10630,6 +10743,10 @@
             <a:prstDash val="solid"/>
           </a:ln>
         </p:spPr>
+        <p:txBody>
+          <a:bodyPr/>
+          <a:p/>
+        </p:txBody>
       </p:sp>
       <p:sp>
         <p:nvSpPr>
@@ -10733,6 +10850,10 @@
             <a:prstDash val="solid"/>
           </a:ln>
         </p:spPr>
+        <p:txBody>
+          <a:bodyPr/>
+          <a:p/>
+        </p:txBody>
       </p:sp>
       <p:sp>
         <p:nvSpPr>
